--- a/ゲーム科1年/00_前期/ゲームプログラミングⅢ/ゲーム数学/座学/19_ベクトルの内積.pptx
+++ b/ゲーム科1年/00_前期/ゲームプログラミングⅢ/ゲーム数学/座学/19_ベクトルの内積.pptx
@@ -261,7 +261,7 @@
           <a:p>
             <a:fld id="{E9CC885B-4903-4D54-9A93-00025F12DED9}" type="datetimeFigureOut">
               <a:rPr kumimoji="1" lang="ja-JP" altLang="en-US" smtClean="0"/>
-              <a:t>2024/10/11</a:t>
+              <a:t>2025/7/8</a:t>
             </a:fld>
             <a:endParaRPr kumimoji="1" lang="ja-JP" altLang="en-US"/>
           </a:p>
@@ -491,7 +491,7 @@
           <a:p>
             <a:fld id="{E9CC885B-4903-4D54-9A93-00025F12DED9}" type="datetimeFigureOut">
               <a:rPr kumimoji="1" lang="ja-JP" altLang="en-US" smtClean="0"/>
-              <a:t>2024/10/11</a:t>
+              <a:t>2025/7/8</a:t>
             </a:fld>
             <a:endParaRPr kumimoji="1" lang="ja-JP" altLang="en-US"/>
           </a:p>
@@ -731,7 +731,7 @@
           <a:p>
             <a:fld id="{E9CC885B-4903-4D54-9A93-00025F12DED9}" type="datetimeFigureOut">
               <a:rPr kumimoji="1" lang="ja-JP" altLang="en-US" smtClean="0"/>
-              <a:t>2024/10/11</a:t>
+              <a:t>2025/7/8</a:t>
             </a:fld>
             <a:endParaRPr kumimoji="1" lang="ja-JP" altLang="en-US"/>
           </a:p>
@@ -961,7 +961,7 @@
           <a:p>
             <a:fld id="{E9CC885B-4903-4D54-9A93-00025F12DED9}" type="datetimeFigureOut">
               <a:rPr kumimoji="1" lang="ja-JP" altLang="en-US" smtClean="0"/>
-              <a:t>2024/10/11</a:t>
+              <a:t>2025/7/8</a:t>
             </a:fld>
             <a:endParaRPr kumimoji="1" lang="ja-JP" altLang="en-US"/>
           </a:p>
@@ -1236,7 +1236,7 @@
           <a:p>
             <a:fld id="{E9CC885B-4903-4D54-9A93-00025F12DED9}" type="datetimeFigureOut">
               <a:rPr kumimoji="1" lang="ja-JP" altLang="en-US" smtClean="0"/>
-              <a:t>2024/10/11</a:t>
+              <a:t>2025/7/8</a:t>
             </a:fld>
             <a:endParaRPr kumimoji="1" lang="ja-JP" altLang="en-US"/>
           </a:p>
@@ -1565,7 +1565,7 @@
           <a:p>
             <a:fld id="{E9CC885B-4903-4D54-9A93-00025F12DED9}" type="datetimeFigureOut">
               <a:rPr kumimoji="1" lang="ja-JP" altLang="en-US" smtClean="0"/>
-              <a:t>2024/10/11</a:t>
+              <a:t>2025/7/8</a:t>
             </a:fld>
             <a:endParaRPr kumimoji="1" lang="ja-JP" altLang="en-US"/>
           </a:p>
@@ -2041,7 +2041,7 @@
           <a:p>
             <a:fld id="{E9CC885B-4903-4D54-9A93-00025F12DED9}" type="datetimeFigureOut">
               <a:rPr kumimoji="1" lang="ja-JP" altLang="en-US" smtClean="0"/>
-              <a:t>2024/10/11</a:t>
+              <a:t>2025/7/8</a:t>
             </a:fld>
             <a:endParaRPr kumimoji="1" lang="ja-JP" altLang="en-US"/>
           </a:p>
@@ -2182,7 +2182,7 @@
           <a:p>
             <a:fld id="{E9CC885B-4903-4D54-9A93-00025F12DED9}" type="datetimeFigureOut">
               <a:rPr kumimoji="1" lang="ja-JP" altLang="en-US" smtClean="0"/>
-              <a:t>2024/10/11</a:t>
+              <a:t>2025/7/8</a:t>
             </a:fld>
             <a:endParaRPr kumimoji="1" lang="ja-JP" altLang="en-US"/>
           </a:p>
@@ -2295,7 +2295,7 @@
           <a:p>
             <a:fld id="{E9CC885B-4903-4D54-9A93-00025F12DED9}" type="datetimeFigureOut">
               <a:rPr kumimoji="1" lang="ja-JP" altLang="en-US" smtClean="0"/>
-              <a:t>2024/10/11</a:t>
+              <a:t>2025/7/8</a:t>
             </a:fld>
             <a:endParaRPr kumimoji="1" lang="ja-JP" altLang="en-US"/>
           </a:p>
@@ -2638,7 +2638,7 @@
           <a:p>
             <a:fld id="{E9CC885B-4903-4D54-9A93-00025F12DED9}" type="datetimeFigureOut">
               <a:rPr kumimoji="1" lang="ja-JP" altLang="en-US" smtClean="0"/>
-              <a:t>2024/10/11</a:t>
+              <a:t>2025/7/8</a:t>
             </a:fld>
             <a:endParaRPr kumimoji="1" lang="ja-JP" altLang="en-US"/>
           </a:p>
@@ -2926,7 +2926,7 @@
           <a:p>
             <a:fld id="{E9CC885B-4903-4D54-9A93-00025F12DED9}" type="datetimeFigureOut">
               <a:rPr kumimoji="1" lang="ja-JP" altLang="en-US" smtClean="0"/>
-              <a:t>2024/10/11</a:t>
+              <a:t>2025/7/8</a:t>
             </a:fld>
             <a:endParaRPr kumimoji="1" lang="ja-JP" altLang="en-US"/>
           </a:p>
@@ -3199,7 +3199,7 @@
           <a:p>
             <a:fld id="{E9CC885B-4903-4D54-9A93-00025F12DED9}" type="datetimeFigureOut">
               <a:rPr kumimoji="1" lang="ja-JP" altLang="en-US" smtClean="0"/>
-              <a:t>2024/10/11</a:t>
+              <a:t>2025/7/8</a:t>
             </a:fld>
             <a:endParaRPr kumimoji="1" lang="ja-JP" altLang="en-US"/>
           </a:p>
@@ -3618,6 +3618,60 @@
       </p:grpSpPr>
       <p:sp>
         <p:nvSpPr>
+          <p:cNvPr id="2" name="四角形: 角を丸くする 1">
+            <a:extLst>
+              <a:ext uri="{FF2B5EF4-FFF2-40B4-BE49-F238E27FC236}">
+                <a16:creationId xmlns:a16="http://schemas.microsoft.com/office/drawing/2014/main" id="{39582B50-DCDF-43CF-867D-10435FEDA346}"/>
+              </a:ext>
+            </a:extLst>
+          </p:cNvPr>
+          <p:cNvSpPr/>
+          <p:nvPr/>
+        </p:nvSpPr>
+        <p:spPr>
+          <a:xfrm>
+            <a:off x="347133" y="2167467"/>
+            <a:ext cx="8170334" cy="2937933"/>
+          </a:xfrm>
+          <a:prstGeom prst="roundRect">
+            <a:avLst/>
+          </a:prstGeom>
+          <a:solidFill>
+            <a:schemeClr val="bg1">
+              <a:lumMod val="75000"/>
+            </a:schemeClr>
+          </a:solidFill>
+          <a:ln>
+            <a:noFill/>
+          </a:ln>
+        </p:spPr>
+        <p:style>
+          <a:lnRef idx="2">
+            <a:schemeClr val="accent1">
+              <a:shade val="50000"/>
+            </a:schemeClr>
+          </a:lnRef>
+          <a:fillRef idx="1">
+            <a:schemeClr val="accent1"/>
+          </a:fillRef>
+          <a:effectRef idx="0">
+            <a:schemeClr val="accent1"/>
+          </a:effectRef>
+          <a:fontRef idx="minor">
+            <a:schemeClr val="lt1"/>
+          </a:fontRef>
+        </p:style>
+        <p:txBody>
+          <a:bodyPr rtlCol="0" anchor="ctr"/>
+          <a:lstStyle/>
+          <a:p>
+            <a:pPr algn="ctr"/>
+            <a:endParaRPr kumimoji="1" lang="ja-JP" altLang="en-US"/>
+          </a:p>
+        </p:txBody>
+      </p:sp>
+      <p:sp>
+        <p:nvSpPr>
           <p:cNvPr id="4" name="テキスト ボックス 3">
             <a:extLst>
               <a:ext uri="{FF2B5EF4-FFF2-40B4-BE49-F238E27FC236}">
@@ -3652,8 +3706,8 @@
           </a:p>
         </p:txBody>
       </p:sp>
-      <mc:AlternateContent xmlns:mc="http://schemas.openxmlformats.org/markup-compatibility/2006">
-        <mc:Choice xmlns:a14="http://schemas.microsoft.com/office/drawing/2010/main" Requires="a14">
+      <mc:AlternateContent xmlns:mc="http://schemas.openxmlformats.org/markup-compatibility/2006" xmlns:a14="http://schemas.microsoft.com/office/drawing/2010/main">
+        <mc:Choice Requires="a14">
           <p:sp>
             <p:nvSpPr>
               <p:cNvPr id="6" name="テキスト ボックス 5">
@@ -4526,7 +4580,7 @@
             </p:txBody>
           </p:sp>
         </mc:Choice>
-        <mc:Fallback>
+        <mc:Fallback xmlns="">
           <p:sp>
             <p:nvSpPr>
               <p:cNvPr id="6" name="テキスト ボックス 5">
@@ -4637,8 +4691,8 @@
           </a:p>
         </p:txBody>
       </p:sp>
-      <mc:AlternateContent xmlns:mc="http://schemas.openxmlformats.org/markup-compatibility/2006">
-        <mc:Choice xmlns:a14="http://schemas.microsoft.com/office/drawing/2010/main" Requires="a14">
+      <mc:AlternateContent xmlns:mc="http://schemas.openxmlformats.org/markup-compatibility/2006" xmlns:a14="http://schemas.microsoft.com/office/drawing/2010/main">
+        <mc:Choice Requires="a14">
           <p:sp>
             <p:nvSpPr>
               <p:cNvPr id="6" name="テキスト ボックス 5">
@@ -4796,19 +4850,13 @@
                       <a:rPr lang="en-US" altLang="ja-JP" sz="2400" b="0" i="1" smtClean="0">
                         <a:latin typeface="Cambria Math" panose="02040503050406030204" pitchFamily="18" charset="0"/>
                       </a:rPr>
-                      <m:t>=−9×7+2</m:t>
-                    </m:r>
-                    <m:r>
-                      <a:rPr lang="en-US" altLang="ja-JP" sz="2400" i="1">
-                        <a:latin typeface="Cambria Math" panose="02040503050406030204" pitchFamily="18" charset="0"/>
-                      </a:rPr>
-                      <m:t>×</m:t>
+                      <m:t>=−9×7+2×3=−</m:t>
                     </m:r>
                     <m:r>
                       <a:rPr lang="en-US" altLang="ja-JP" sz="2400" b="0" i="1" smtClean="0">
                         <a:latin typeface="Cambria Math" panose="02040503050406030204" pitchFamily="18" charset="0"/>
                       </a:rPr>
-                      <m:t>3=−63+6=</m:t>
+                      <m:t>63+6=</m:t>
                     </m:r>
                     <m:r>
                       <a:rPr lang="en-US" altLang="ja-JP" sz="2400" b="1" i="1" smtClean="0">
@@ -4863,7 +4911,7 @@
             </p:txBody>
           </p:sp>
         </mc:Choice>
-        <mc:Fallback>
+        <mc:Fallback xmlns="">
           <p:sp>
             <p:nvSpPr>
               <p:cNvPr id="6" name="テキスト ボックス 5">
@@ -4974,8 +5022,8 @@
           </a:p>
         </p:txBody>
       </p:sp>
-      <mc:AlternateContent xmlns:mc="http://schemas.openxmlformats.org/markup-compatibility/2006">
-        <mc:Choice xmlns:a14="http://schemas.microsoft.com/office/drawing/2010/main" Requires="a14">
+      <mc:AlternateContent xmlns:mc="http://schemas.openxmlformats.org/markup-compatibility/2006" xmlns:a14="http://schemas.microsoft.com/office/drawing/2010/main">
+        <mc:Choice Requires="a14">
           <p:sp>
             <p:nvSpPr>
               <p:cNvPr id="6" name="テキスト ボックス 5">
@@ -5141,25 +5189,7 @@
                           <a:rPr lang="en-US" altLang="ja-JP" sz="2400" b="0" i="1" smtClean="0">
                             <a:latin typeface="Cambria Math" panose="02040503050406030204" pitchFamily="18" charset="0"/>
                           </a:rPr>
-                          <m:t>−</m:t>
-                        </m:r>
-                        <m:r>
-                          <a:rPr lang="en-US" altLang="ja-JP" sz="2400" b="0" i="1" smtClean="0">
-                            <a:latin typeface="Cambria Math" panose="02040503050406030204" pitchFamily="18" charset="0"/>
-                          </a:rPr>
-                          <m:t>1</m:t>
-                        </m:r>
-                        <m:r>
-                          <a:rPr lang="en-US" altLang="ja-JP" sz="2400" b="0" i="1" smtClean="0">
-                            <a:latin typeface="Cambria Math" panose="02040503050406030204" pitchFamily="18" charset="0"/>
-                          </a:rPr>
-                          <m:t>, </m:t>
-                        </m:r>
-                        <m:r>
-                          <a:rPr lang="en-US" altLang="ja-JP" sz="2400" b="0" i="1" smtClean="0">
-                            <a:latin typeface="Cambria Math" panose="02040503050406030204" pitchFamily="18" charset="0"/>
-                          </a:rPr>
-                          <m:t>4, 2</m:t>
+                          <m:t>−1, 4, 2</m:t>
                         </m:r>
                       </m:e>
                     </m:d>
@@ -5188,7 +5218,7 @@
             </p:txBody>
           </p:sp>
         </mc:Choice>
-        <mc:Fallback>
+        <mc:Fallback xmlns="">
           <p:sp>
             <p:nvSpPr>
               <p:cNvPr id="6" name="テキスト ボックス 5">
